--- a/dist/초1/수학/수와연산/초1_수학_수와연산_01_9까지의수.pptx
+++ b/dist/초1/수학/수와연산/초1_수학_수와연산_01_9까지의수.pptx
@@ -119,13 +119,13 @@
   <p:extLst>
     <p:ext uri="{521415D9-36F7-43E2-AB2F-B90AF26B5E84}">
       <p14:sectionLst xmlns:p14="http://schemas.microsoft.com/office/powerpoint/2010/main">
-        <p14:section name="도입" id="{c66b6d40-c1b3-accb-05d7-ccd6ab61cc3e}">
+        <p14:section name="도입" id="{56e98aeb-2328-0ab2-0aba-37ce48060b90}">
           <p14:sldIdLst>
             <p14:sldId id="256"/>
             <p14:sldId id="257"/>
           </p14:sldIdLst>
         </p14:section>
-        <p14:section name="개념" id="{c26cf877-32e9-8cb2-a48d-ba158b9560f2}">
+        <p14:section name="개념" id="{46b7b5ab-1688-f46d-e8dc-a76a9dd7f2a0}">
           <p14:sldIdLst>
             <p14:sldId id="258"/>
             <p14:sldId id="259"/>
@@ -134,24 +134,24 @@
             <p14:sldId id="262"/>
           </p14:sldIdLst>
         </p14:section>
-        <p14:section name="연습" id="{888d4ea3-39d3-b96b-d358-7162fbabc02b}">
+        <p14:section name="연습" id="{66f5cafb-e391-a74f-9e8f-0f368071160b}">
           <p14:sldIdLst>
             <p14:sldId id="263"/>
             <p14:sldId id="264"/>
           </p14:sldIdLst>
         </p14:section>
-        <p14:section name="확인" id="{473f7b6e-ddd5-987e-66aa-04f99c055045}">
+        <p14:section name="확인" id="{c16beeab-f3a2-65ca-bdf5-c64a95f62805}">
           <p14:sldIdLst>
             <p14:sldId id="265"/>
             <p14:sldId id="266"/>
           </p14:sldIdLst>
         </p14:section>
-        <p14:section name="정리" id="{bfbac797-4afb-c3d4-578e-c1f717ad0c03}">
+        <p14:section name="정리" id="{02506a0a-bd01-06b4-8fd4-c897cad3cc8f}">
           <p14:sldIdLst>
             <p14:sldId id="267"/>
           </p14:sldIdLst>
         </p14:section>
-        <p14:section name="보충" id="{dc5419bb-df5d-b09e-0ad8-16972f40ea56}">
+        <p14:section name="보충" id="{4e98ceab-4952-a9b0-9efa-a26133d5e011}">
           <p14:sldIdLst>
             <p14:sldId id="268"/>
           </p14:sldIdLst>
@@ -2823,7 +2823,7 @@
           <a:bodyPr wrap="square" lIns="0" tIns="0" rIns="0" bIns="0" rtlCol="0" anchor="ctr"/>
           <a:lstStyle/>
           <a:p>
-            <a:pPr algn="l" indent="0" marL="0">
+            <a:pPr eaLnBrk="0" algn="l" indent="0" marL="0">
               <a:buNone/>
             </a:pPr>
             <a:r>
@@ -2864,7 +2864,7 @@
           <a:bodyPr wrap="square" lIns="0" tIns="0" rIns="0" bIns="0" rtlCol="0" anchor="t"/>
           <a:lstStyle/>
           <a:p>
-            <a:pPr indent="0" marL="0">
+            <a:pPr eaLnBrk="0" indent="0" marL="0">
               <a:buNone/>
             </a:pPr>
             <a:r>
@@ -3309,7 +3309,7 @@
       </p:sp>
       <p:sp>
         <p:nvSpPr>
-          <p:cNvPr id="21" name="S01-figure18" descr="십 칸 틀에 7개"/>
+          <p:cNvPr id="21" name="S01-figure18" descr="1개의 십 칸 틀 중 1번째: 모두 7개"/>
           <p:cNvSpPr/>
           <p:nvPr/>
         </p:nvSpPr>
@@ -3382,7 +3382,7 @@
           <a:bodyPr wrap="square" lIns="0" tIns="0" rIns="0" bIns="0" rtlCol="0" anchor="ctr"/>
           <a:lstStyle/>
           <a:p>
-            <a:pPr indent="0" marL="0">
+            <a:pPr eaLnBrk="0" indent="0" marL="0">
               <a:spcAft>
                 <a:spcPts val="600"/>
               </a:spcAft>
@@ -3402,7 +3402,7 @@
             <a:endParaRPr lang="ko-KR" sz="3200" dirty="0"/>
           </a:p>
           <a:p>
-            <a:pPr indent="0" marL="0">
+            <a:pPr eaLnBrk="0" indent="0" marL="0">
               <a:spcAft>
                 <a:spcPts val="600"/>
               </a:spcAft>
@@ -3422,7 +3422,7 @@
             <a:endParaRPr lang="ko-KR" sz="3200" dirty="0"/>
           </a:p>
           <a:p>
-            <a:pPr indent="0" marL="0">
+            <a:pPr eaLnBrk="0" indent="0" marL="0">
               <a:spcAft>
                 <a:spcPts val="600"/>
               </a:spcAft>
@@ -3491,7 +3491,7 @@
           <a:bodyPr wrap="square" lIns="0" tIns="0" rIns="0" bIns="0" rtlCol="0" anchor="ctr"/>
           <a:lstStyle/>
           <a:p>
-            <a:pPr algn="l" indent="0" marL="0">
+            <a:pPr eaLnBrk="0" algn="l" indent="0" marL="0">
               <a:buNone/>
             </a:pPr>
             <a:r>
@@ -3530,7 +3530,7 @@
           <a:bodyPr wrap="square" lIns="0" tIns="0" rIns="0" bIns="0" rtlCol="0" anchor="ctr"/>
           <a:lstStyle/>
           <a:p>
-            <a:pPr algn="l" indent="0" marL="0">
+            <a:pPr eaLnBrk="0" algn="l" indent="0" marL="0">
               <a:buNone/>
             </a:pPr>
             <a:r>
@@ -3577,7 +3577,7 @@
           <a:bodyPr wrap="square" lIns="0" tIns="0" rIns="0" bIns="0" rtlCol="0" anchor="ctr"/>
           <a:lstStyle/>
           <a:p>
-            <a:pPr algn="ctr" indent="0" marL="0">
+            <a:pPr eaLnBrk="0" algn="ctr" indent="0" marL="0">
               <a:buNone/>
             </a:pPr>
             <a:r>
@@ -3616,7 +3616,7 @@
           <a:bodyPr wrap="square" lIns="0" tIns="0" rIns="0" bIns="0" rtlCol="0" anchor="ctr"/>
           <a:lstStyle/>
           <a:p>
-            <a:pPr algn="l" indent="0" marL="0">
+            <a:pPr eaLnBrk="0" algn="l" indent="0" marL="0">
               <a:buNone/>
             </a:pPr>
             <a:r>
@@ -3663,7 +3663,7 @@
           <a:bodyPr wrap="square" lIns="0" tIns="0" rIns="0" bIns="0" rtlCol="0" anchor="ctr"/>
           <a:lstStyle/>
           <a:p>
-            <a:pPr algn="ctr" indent="0" marL="0">
+            <a:pPr eaLnBrk="0" algn="ctr" indent="0" marL="0">
               <a:buNone/>
             </a:pPr>
             <a:r>
@@ -3702,7 +3702,7 @@
           <a:bodyPr wrap="square" lIns="0" tIns="0" rIns="0" bIns="0" rtlCol="0" anchor="ctr"/>
           <a:lstStyle/>
           <a:p>
-            <a:pPr algn="l" indent="0" marL="0">
+            <a:pPr eaLnBrk="0" algn="l" indent="0" marL="0">
               <a:buNone/>
             </a:pPr>
             <a:r>
@@ -3749,7 +3749,7 @@
           <a:bodyPr wrap="square" lIns="0" tIns="0" rIns="0" bIns="0" rtlCol="0" anchor="ctr"/>
           <a:lstStyle/>
           <a:p>
-            <a:pPr algn="ctr" indent="0" marL="0">
+            <a:pPr eaLnBrk="0" algn="ctr" indent="0" marL="0">
               <a:buNone/>
             </a:pPr>
             <a:r>
@@ -3788,7 +3788,7 @@
           <a:bodyPr wrap="square" lIns="0" tIns="0" rIns="0" bIns="0" rtlCol="0" anchor="ctr"/>
           <a:lstStyle/>
           <a:p>
-            <a:pPr algn="l" indent="0" marL="0">
+            <a:pPr eaLnBrk="0" algn="l" indent="0" marL="0">
               <a:buNone/>
             </a:pPr>
             <a:r>
@@ -3845,7 +3845,7 @@
             </a:lvl1pPr>
           </a:lstStyle>
           <a:p>
-            <a:pPr algn="r"/>
+            <a:pPr eaLnBrk="0" algn="r"/>
             <a:fld id="{F7021451-1387-4CA6-816F-3879F97B5CBC}" type="slidenum">
               <a:rPr b="0" lang="en-US"/>
               <a:t>10</a:t>
@@ -3902,7 +3902,7 @@
           <a:bodyPr wrap="square" lIns="0" tIns="0" rIns="0" bIns="0" rtlCol="0" anchor="ctr"/>
           <a:lstStyle/>
           <a:p>
-            <a:pPr algn="l" indent="0" marL="0">
+            <a:pPr eaLnBrk="0" algn="l" indent="0" marL="0">
               <a:buNone/>
             </a:pPr>
             <a:r>
@@ -3968,7 +3968,7 @@
           <a:bodyPr wrap="square" lIns="0" tIns="0" rIns="0" bIns="0" rtlCol="0" anchor="ctr"/>
           <a:lstStyle/>
           <a:p>
-            <a:pPr indent="0" marL="0">
+            <a:pPr eaLnBrk="0" indent="0" marL="0">
               <a:spcAft>
                 <a:spcPts val="600"/>
               </a:spcAft>
@@ -4018,7 +4018,7 @@
           <a:bodyPr wrap="square" lIns="0" tIns="0" rIns="0" bIns="0" rtlCol="0" anchor="ctr"/>
           <a:lstStyle/>
           <a:p>
-            <a:pPr algn="ctr" indent="0" marL="0">
+            <a:pPr eaLnBrk="0" algn="ctr" indent="0" marL="0">
               <a:buNone/>
             </a:pPr>
             <a:r>
@@ -4438,7 +4438,7 @@
       </p:sp>
       <p:sp>
         <p:nvSpPr>
-          <p:cNvPr id="22" name="S11-figure277" descr="십 칸 틀에 6개"/>
+          <p:cNvPr id="22" name="S11-figure277" descr="1개의 십 칸 틀 중 1번째: 모두 6개"/>
           <p:cNvSpPr/>
           <p:nvPr/>
         </p:nvSpPr>
@@ -4492,7 +4492,7 @@
           <a:bodyPr wrap="square" lIns="0" tIns="0" rIns="0" bIns="0" rtlCol="0" anchor="ctr"/>
           <a:lstStyle/>
           <a:p>
-            <a:pPr algn="ctr" indent="0" marL="0">
+            <a:pPr eaLnBrk="0" algn="ctr" indent="0" marL="0">
               <a:buNone/>
             </a:pPr>
             <a:r>
@@ -4987,7 +4987,7 @@
       </p:sp>
       <p:sp>
         <p:nvSpPr>
-          <p:cNvPr id="43" name="S11-figure298" descr="십 칸 틀에 9개"/>
+          <p:cNvPr id="43" name="S11-figure298" descr="1개의 십 칸 틀 중 1번째: 모두 9개"/>
           <p:cNvSpPr/>
           <p:nvPr/>
         </p:nvSpPr>
@@ -5041,7 +5041,7 @@
           <a:bodyPr wrap="square" lIns="0" tIns="0" rIns="0" bIns="0" rtlCol="0" anchor="ctr"/>
           <a:lstStyle/>
           <a:p>
-            <a:pPr algn="ctr" indent="0" marL="0">
+            <a:pPr eaLnBrk="0" algn="ctr" indent="0" marL="0">
               <a:buNone/>
             </a:pPr>
             <a:r>
@@ -5252,7 +5252,7 @@
             </a:lvl1pPr>
           </a:lstStyle>
           <a:p>
-            <a:pPr algn="r"/>
+            <a:pPr eaLnBrk="0" algn="r"/>
             <a:fld id="{F7021451-1387-4CA6-816F-3879F97B5CBC}" type="slidenum">
               <a:rPr b="0" lang="en-US"/>
               <a:t>11</a:t>
@@ -5309,7 +5309,7 @@
           <a:bodyPr wrap="square" lIns="0" tIns="0" rIns="0" bIns="0" rtlCol="0" anchor="ctr"/>
           <a:lstStyle/>
           <a:p>
-            <a:pPr algn="l" indent="0" marL="0">
+            <a:pPr eaLnBrk="0" algn="l" indent="0" marL="0">
               <a:buNone/>
             </a:pPr>
             <a:r>
@@ -5375,7 +5375,7 @@
           <a:bodyPr wrap="square" lIns="0" tIns="0" rIns="0" bIns="0" rtlCol="0" anchor="ctr"/>
           <a:lstStyle/>
           <a:p>
-            <a:pPr indent="0" marL="0">
+            <a:pPr eaLnBrk="0" indent="0" marL="0">
               <a:spcAft>
                 <a:spcPts val="600"/>
               </a:spcAft>
@@ -5425,7 +5425,7 @@
           <a:bodyPr wrap="square" lIns="177800" tIns="0" rIns="177800" bIns="0" rtlCol="0" anchor="ctr"/>
           <a:lstStyle/>
           <a:p>
-            <a:pPr algn="l" indent="0" marL="0">
+            <a:pPr eaLnBrk="0" algn="l" indent="0" marL="0">
               <a:buNone/>
             </a:pPr>
             <a:r>
@@ -5472,7 +5472,7 @@
           <a:bodyPr wrap="square" lIns="177800" tIns="0" rIns="177800" bIns="0" rtlCol="0" anchor="ctr"/>
           <a:lstStyle/>
           <a:p>
-            <a:pPr algn="l" indent="0" marL="0">
+            <a:pPr eaLnBrk="0" algn="l" indent="0" marL="0">
               <a:buNone/>
             </a:pPr>
             <a:r>
@@ -5511,7 +5511,7 @@
           <a:bodyPr wrap="square" lIns="0" tIns="0" rIns="0" bIns="0" rtlCol="0" anchor="t"/>
           <a:lstStyle/>
           <a:p>
-            <a:pPr algn="l" indent="0" marL="0">
+            <a:pPr eaLnBrk="0" algn="l" indent="0" marL="0">
               <a:buNone/>
             </a:pPr>
             <a:r>
@@ -5550,7 +5550,7 @@
           <a:bodyPr wrap="square" lIns="0" tIns="0" rIns="0" bIns="0" rtlCol="0" anchor="ctr"/>
           <a:lstStyle/>
           <a:p>
-            <a:pPr algn="l" indent="0" marL="0">
+            <a:pPr eaLnBrk="0" algn="l" indent="0" marL="0">
               <a:buNone/>
             </a:pPr>
             <a:r>
@@ -5589,7 +5589,7 @@
           <a:bodyPr wrap="square" lIns="0" tIns="0" rIns="0" bIns="0" rtlCol="0" anchor="ctr"/>
           <a:lstStyle/>
           <a:p>
-            <a:pPr algn="l" indent="0" marL="0">
+            <a:pPr eaLnBrk="0" algn="l" indent="0" marL="0">
               <a:buNone/>
             </a:pPr>
             <a:r>
@@ -5628,7 +5628,7 @@
           <a:bodyPr wrap="square" lIns="0" tIns="0" rIns="0" bIns="0" rtlCol="0" anchor="ctr"/>
           <a:lstStyle/>
           <a:p>
-            <a:pPr algn="l" indent="0" marL="0">
+            <a:pPr eaLnBrk="0" algn="l" indent="0" marL="0">
               <a:buNone/>
             </a:pPr>
             <a:r>
@@ -5667,7 +5667,7 @@
           <a:bodyPr wrap="square" lIns="0" tIns="0" rIns="0" bIns="0" rtlCol="0" anchor="ctr"/>
           <a:lstStyle/>
           <a:p>
-            <a:pPr algn="l" indent="0" marL="0">
+            <a:pPr eaLnBrk="0" algn="l" indent="0" marL="0">
               <a:buNone/>
             </a:pPr>
             <a:r>
@@ -5724,7 +5724,7 @@
             </a:lvl1pPr>
           </a:lstStyle>
           <a:p>
-            <a:pPr algn="r"/>
+            <a:pPr eaLnBrk="0" algn="r"/>
             <a:fld id="{F7021451-1387-4CA6-816F-3879F97B5CBC}" type="slidenum">
               <a:rPr b="0" lang="en-US"/>
               <a:t>12</a:t>
@@ -5781,7 +5781,7 @@
           <a:bodyPr wrap="square" lIns="0" tIns="0" rIns="0" bIns="0" rtlCol="0" anchor="ctr"/>
           <a:lstStyle/>
           <a:p>
-            <a:pPr algn="l" indent="0" marL="0">
+            <a:pPr eaLnBrk="0" algn="l" indent="0" marL="0">
               <a:buNone/>
             </a:pPr>
             <a:r>
@@ -5847,7 +5847,7 @@
           <a:bodyPr wrap="square" lIns="0" tIns="0" rIns="0" bIns="0" rtlCol="0" anchor="ctr"/>
           <a:lstStyle/>
           <a:p>
-            <a:pPr indent="0" marL="0">
+            <a:pPr eaLnBrk="0" indent="0" marL="0">
               <a:spcAft>
                 <a:spcPts val="600"/>
               </a:spcAft>
@@ -6018,7 +6018,7 @@
           <a:bodyPr wrap="square" lIns="0" tIns="0" rIns="0" bIns="0" rtlCol="0" anchor="ctr"/>
           <a:lstStyle/>
           <a:p>
-            <a:pPr algn="ctr" indent="0" marL="0">
+            <a:pPr eaLnBrk="0" algn="ctr" indent="0" marL="0">
               <a:buNone/>
             </a:pPr>
             <a:r>
@@ -6211,7 +6211,7 @@
           <a:bodyPr wrap="square" lIns="0" tIns="0" rIns="0" bIns="0" rtlCol="0" anchor="ctr"/>
           <a:lstStyle/>
           <a:p>
-            <a:pPr algn="ctr" indent="0" marL="0">
+            <a:pPr eaLnBrk="0" algn="ctr" indent="0" marL="0">
               <a:buNone/>
             </a:pPr>
             <a:r>
@@ -6268,7 +6268,7 @@
             </a:lvl1pPr>
           </a:lstStyle>
           <a:p>
-            <a:pPr algn="r"/>
+            <a:pPr eaLnBrk="0" algn="r"/>
             <a:fld id="{F7021451-1387-4CA6-816F-3879F97B5CBC}" type="slidenum">
               <a:rPr b="0" lang="en-US"/>
               <a:t>13</a:t>
@@ -6325,7 +6325,7 @@
           <a:bodyPr wrap="square" lIns="0" tIns="0" rIns="0" bIns="0" rtlCol="0" anchor="ctr"/>
           <a:lstStyle/>
           <a:p>
-            <a:pPr algn="l" indent="0" marL="0">
+            <a:pPr eaLnBrk="0" algn="l" indent="0" marL="0">
               <a:buNone/>
             </a:pPr>
             <a:r>
@@ -6391,7 +6391,7 @@
           <a:bodyPr wrap="square" lIns="0" tIns="0" rIns="0" bIns="0" rtlCol="0" anchor="ctr"/>
           <a:lstStyle/>
           <a:p>
-            <a:pPr indent="0" marL="0">
+            <a:pPr eaLnBrk="0" indent="0" marL="0">
               <a:spcAft>
                 <a:spcPts val="600"/>
               </a:spcAft>
@@ -6441,7 +6441,7 @@
           <a:bodyPr wrap="square" lIns="0" tIns="0" rIns="0" bIns="0" rtlCol="0" anchor="ctr"/>
           <a:lstStyle/>
           <a:p>
-            <a:pPr algn="ctr" indent="0" marL="0">
+            <a:pPr eaLnBrk="0" algn="ctr" indent="0" marL="0">
               <a:buNone/>
             </a:pPr>
             <a:r>
@@ -6617,7 +6617,7 @@
           <a:bodyPr wrap="square" lIns="0" tIns="0" rIns="0" bIns="0" rtlCol="0" anchor="ctr"/>
           <a:lstStyle/>
           <a:p>
-            <a:pPr algn="ctr" indent="0" marL="0">
+            <a:pPr eaLnBrk="0" algn="ctr" indent="0" marL="0">
               <a:buNone/>
             </a:pPr>
             <a:r>
@@ -6853,7 +6853,7 @@
             </a:lvl1pPr>
           </a:lstStyle>
           <a:p>
-            <a:pPr algn="r"/>
+            <a:pPr eaLnBrk="0" algn="r"/>
             <a:fld id="{F7021451-1387-4CA6-816F-3879F97B5CBC}" type="slidenum">
               <a:rPr b="0" lang="en-US"/>
               <a:t>2</a:t>
@@ -6910,7 +6910,7 @@
           <a:bodyPr wrap="square" lIns="0" tIns="0" rIns="0" bIns="0" rtlCol="0" anchor="ctr"/>
           <a:lstStyle/>
           <a:p>
-            <a:pPr algn="l" indent="0" marL="0">
+            <a:pPr eaLnBrk="0" algn="l" indent="0" marL="0">
               <a:buNone/>
             </a:pPr>
             <a:r>
@@ -6976,7 +6976,7 @@
           <a:bodyPr wrap="square" lIns="0" tIns="0" rIns="0" bIns="0" rtlCol="0" anchor="ctr"/>
           <a:lstStyle/>
           <a:p>
-            <a:pPr indent="0" marL="0">
+            <a:pPr eaLnBrk="0" indent="0" marL="0">
               <a:spcAft>
                 <a:spcPts val="600"/>
               </a:spcAft>
@@ -7199,7 +7199,7 @@
           <a:bodyPr wrap="square" lIns="0" tIns="0" rIns="0" bIns="0" rtlCol="0" anchor="ctr"/>
           <a:lstStyle/>
           <a:p>
-            <a:pPr indent="0" marL="0">
+            <a:pPr eaLnBrk="0" indent="0" marL="0">
               <a:spcAft>
                 <a:spcPts val="600"/>
               </a:spcAft>
@@ -7268,7 +7268,7 @@
           <a:bodyPr wrap="square" lIns="0" tIns="0" rIns="0" bIns="0" rtlCol="0" anchor="ctr"/>
           <a:lstStyle/>
           <a:p>
-            <a:pPr indent="0" marL="0">
+            <a:pPr eaLnBrk="0" indent="0" marL="0">
               <a:spcAft>
                 <a:spcPts val="600"/>
               </a:spcAft>
@@ -7328,7 +7328,7 @@
             </a:lvl1pPr>
           </a:lstStyle>
           <a:p>
-            <a:pPr algn="r"/>
+            <a:pPr eaLnBrk="0" algn="r"/>
             <a:fld id="{F7021451-1387-4CA6-816F-3879F97B5CBC}" type="slidenum">
               <a:rPr b="0" lang="en-US"/>
               <a:t>3</a:t>
@@ -7385,7 +7385,7 @@
           <a:bodyPr wrap="square" lIns="0" tIns="0" rIns="0" bIns="0" rtlCol="0" anchor="ctr"/>
           <a:lstStyle/>
           <a:p>
-            <a:pPr algn="l" indent="0" marL="0">
+            <a:pPr eaLnBrk="0" algn="l" indent="0" marL="0">
               <a:buNone/>
             </a:pPr>
             <a:r>
@@ -7451,7 +7451,7 @@
           <a:bodyPr wrap="square" lIns="0" tIns="0" rIns="0" bIns="0" rtlCol="0" anchor="ctr"/>
           <a:lstStyle/>
           <a:p>
-            <a:pPr indent="0" marL="0">
+            <a:pPr eaLnBrk="0" indent="0" marL="0">
               <a:spcAft>
                 <a:spcPts val="600"/>
               </a:spcAft>
@@ -7547,7 +7547,7 @@
           <a:bodyPr wrap="square" lIns="0" tIns="0" rIns="0" bIns="0" rtlCol="0" anchor="ctr"/>
           <a:lstStyle/>
           <a:p>
-            <a:pPr algn="ctr" indent="0" marL="0">
+            <a:pPr eaLnBrk="0" algn="ctr" indent="0" marL="0">
               <a:buNone/>
             </a:pPr>
             <a:r>
@@ -7665,7 +7665,7 @@
           <a:bodyPr wrap="square" lIns="0" tIns="0" rIns="0" bIns="0" rtlCol="0" anchor="ctr"/>
           <a:lstStyle/>
           <a:p>
-            <a:pPr algn="ctr" indent="0" marL="0">
+            <a:pPr eaLnBrk="0" algn="ctr" indent="0" marL="0">
               <a:buNone/>
             </a:pPr>
             <a:r>
@@ -7808,7 +7808,7 @@
           <a:bodyPr wrap="square" lIns="0" tIns="0" rIns="0" bIns="0" rtlCol="0" anchor="ctr"/>
           <a:lstStyle/>
           <a:p>
-            <a:pPr algn="ctr" indent="0" marL="0">
+            <a:pPr eaLnBrk="0" algn="ctr" indent="0" marL="0">
               <a:buNone/>
             </a:pPr>
             <a:r>
@@ -7976,7 +7976,7 @@
           <a:bodyPr wrap="square" lIns="0" tIns="0" rIns="0" bIns="0" rtlCol="0" anchor="ctr"/>
           <a:lstStyle/>
           <a:p>
-            <a:pPr algn="ctr" indent="0" marL="0">
+            <a:pPr eaLnBrk="0" algn="ctr" indent="0" marL="0">
               <a:buNone/>
             </a:pPr>
             <a:r>
@@ -8169,7 +8169,7 @@
           <a:bodyPr wrap="square" lIns="0" tIns="0" rIns="0" bIns="0" rtlCol="0" anchor="ctr"/>
           <a:lstStyle/>
           <a:p>
-            <a:pPr algn="ctr" indent="0" marL="0">
+            <a:pPr eaLnBrk="0" algn="ctr" indent="0" marL="0">
               <a:buNone/>
             </a:pPr>
             <a:r>
@@ -8226,7 +8226,7 @@
             </a:lvl1pPr>
           </a:lstStyle>
           <a:p>
-            <a:pPr algn="r"/>
+            <a:pPr eaLnBrk="0" algn="r"/>
             <a:fld id="{F7021451-1387-4CA6-816F-3879F97B5CBC}" type="slidenum">
               <a:rPr b="0" lang="en-US"/>
               <a:t>4</a:t>
@@ -8283,7 +8283,7 @@
           <a:bodyPr wrap="square" lIns="0" tIns="0" rIns="0" bIns="0" rtlCol="0" anchor="ctr"/>
           <a:lstStyle/>
           <a:p>
-            <a:pPr algn="l" indent="0" marL="0">
+            <a:pPr eaLnBrk="0" algn="l" indent="0" marL="0">
               <a:buNone/>
             </a:pPr>
             <a:r>
@@ -8349,7 +8349,7 @@
           <a:bodyPr wrap="square" lIns="0" tIns="0" rIns="0" bIns="0" rtlCol="0" anchor="ctr"/>
           <a:lstStyle/>
           <a:p>
-            <a:pPr indent="0" marL="0">
+            <a:pPr eaLnBrk="0" indent="0" marL="0">
               <a:spcAft>
                 <a:spcPts val="600"/>
               </a:spcAft>
@@ -8772,7 +8772,7 @@
       </p:sp>
       <p:sp>
         <p:nvSpPr>
-          <p:cNvPr id="21" name="S05-figure94" descr="십 칸 틀에 6개"/>
+          <p:cNvPr id="21" name="S05-figure94" descr="1개의 십 칸 틀 중 1번째: 모두 6개"/>
           <p:cNvSpPr/>
           <p:nvPr/>
         </p:nvSpPr>
@@ -8818,7 +8818,7 @@
           <a:bodyPr wrap="square" lIns="0" tIns="0" rIns="0" bIns="0" rtlCol="0" anchor="ctr"/>
           <a:lstStyle/>
           <a:p>
-            <a:pPr algn="ctr" indent="0" marL="0">
+            <a:pPr eaLnBrk="0" algn="ctr" indent="0" marL="0">
               <a:buNone/>
             </a:pPr>
             <a:r>
@@ -9263,7 +9263,7 @@
       </p:sp>
       <p:sp>
         <p:nvSpPr>
-          <p:cNvPr id="40" name="S05-figure113" descr="십 칸 틀에 7개"/>
+          <p:cNvPr id="40" name="S05-figure113" descr="1개의 십 칸 틀 중 1번째: 모두 7개"/>
           <p:cNvSpPr/>
           <p:nvPr/>
         </p:nvSpPr>
@@ -9309,7 +9309,7 @@
           <a:bodyPr wrap="square" lIns="0" tIns="0" rIns="0" bIns="0" rtlCol="0" anchor="ctr"/>
           <a:lstStyle/>
           <a:p>
-            <a:pPr algn="ctr" indent="0" marL="0">
+            <a:pPr eaLnBrk="0" algn="ctr" indent="0" marL="0">
               <a:buNone/>
             </a:pPr>
             <a:r>
@@ -9779,7 +9779,7 @@
       </p:sp>
       <p:sp>
         <p:nvSpPr>
-          <p:cNvPr id="60" name="S05-figure133" descr="십 칸 틀에 8개"/>
+          <p:cNvPr id="60" name="S05-figure133" descr="1개의 십 칸 틀 중 1번째: 모두 8개"/>
           <p:cNvSpPr/>
           <p:nvPr/>
         </p:nvSpPr>
@@ -9825,7 +9825,7 @@
           <a:bodyPr wrap="square" lIns="0" tIns="0" rIns="0" bIns="0" rtlCol="0" anchor="ctr"/>
           <a:lstStyle/>
           <a:p>
-            <a:pPr algn="ctr" indent="0" marL="0">
+            <a:pPr eaLnBrk="0" algn="ctr" indent="0" marL="0">
               <a:buNone/>
             </a:pPr>
             <a:r>
@@ -10320,7 +10320,7 @@
       </p:sp>
       <p:sp>
         <p:nvSpPr>
-          <p:cNvPr id="81" name="S05-figure154" descr="십 칸 틀에 9개"/>
+          <p:cNvPr id="81" name="S05-figure154" descr="1개의 십 칸 틀 중 1번째: 모두 9개"/>
           <p:cNvSpPr/>
           <p:nvPr/>
         </p:nvSpPr>
@@ -10366,7 +10366,7 @@
           <a:bodyPr wrap="square" lIns="0" tIns="0" rIns="0" bIns="0" rtlCol="0" anchor="ctr"/>
           <a:lstStyle/>
           <a:p>
-            <a:pPr algn="ctr" indent="0" marL="0">
+            <a:pPr eaLnBrk="0" algn="ctr" indent="0" marL="0">
               <a:buNone/>
             </a:pPr>
             <a:r>
@@ -10423,7 +10423,7 @@
             </a:lvl1pPr>
           </a:lstStyle>
           <a:p>
-            <a:pPr algn="r"/>
+            <a:pPr eaLnBrk="0" algn="r"/>
             <a:fld id="{F7021451-1387-4CA6-816F-3879F97B5CBC}" type="slidenum">
               <a:rPr b="0" lang="en-US"/>
               <a:t>5</a:t>
@@ -10480,7 +10480,7 @@
           <a:bodyPr wrap="square" lIns="0" tIns="0" rIns="0" bIns="0" rtlCol="0" anchor="ctr"/>
           <a:lstStyle/>
           <a:p>
-            <a:pPr algn="l" indent="0" marL="0">
+            <a:pPr eaLnBrk="0" algn="l" indent="0" marL="0">
               <a:buNone/>
             </a:pPr>
             <a:r>
@@ -10546,7 +10546,7 @@
           <a:bodyPr wrap="square" lIns="0" tIns="0" rIns="0" bIns="0" rtlCol="0" anchor="ctr"/>
           <a:lstStyle/>
           <a:p>
-            <a:pPr indent="0" marL="0">
+            <a:pPr eaLnBrk="0" indent="0" marL="0">
               <a:spcAft>
                 <a:spcPts val="600"/>
               </a:spcAft>
@@ -10894,7 +10894,7 @@
       </p:sp>
       <p:sp>
         <p:nvSpPr>
-          <p:cNvPr id="18" name="S06-figure171" descr="십 칸 틀에 3개"/>
+          <p:cNvPr id="18" name="S06-figure171" descr="1개의 십 칸 틀 중 1번째: 모두 3개"/>
           <p:cNvSpPr/>
           <p:nvPr/>
         </p:nvSpPr>
@@ -10940,7 +10940,7 @@
           <a:bodyPr wrap="square" lIns="0" tIns="0" rIns="0" bIns="0" rtlCol="0" anchor="ctr"/>
           <a:lstStyle/>
           <a:p>
-            <a:pPr algn="ctr" indent="0" marL="0">
+            <a:pPr eaLnBrk="0" algn="ctr" indent="0" marL="0">
               <a:buNone/>
             </a:pPr>
             <a:r>
@@ -11210,7 +11210,7 @@
       </p:sp>
       <p:sp>
         <p:nvSpPr>
-          <p:cNvPr id="30" name="S06-figure183" descr="십 칸 틀에 0개"/>
+          <p:cNvPr id="30" name="S06-figure183" descr="1개의 십 칸 틀 중 1번째: 모두 0개"/>
           <p:cNvSpPr/>
           <p:nvPr/>
         </p:nvSpPr>
@@ -11256,7 +11256,7 @@
           <a:bodyPr wrap="square" lIns="0" tIns="0" rIns="0" bIns="0" rtlCol="0" anchor="ctr"/>
           <a:lstStyle/>
           <a:p>
-            <a:pPr algn="ctr" indent="0" marL="0">
+            <a:pPr eaLnBrk="0" algn="ctr" indent="0" marL="0">
               <a:buNone/>
             </a:pPr>
             <a:r>
@@ -11313,7 +11313,7 @@
             </a:lvl1pPr>
           </a:lstStyle>
           <a:p>
-            <a:pPr algn="r"/>
+            <a:pPr eaLnBrk="0" algn="r"/>
             <a:fld id="{F7021451-1387-4CA6-816F-3879F97B5CBC}" type="slidenum">
               <a:rPr b="0" lang="en-US"/>
               <a:t>6</a:t>
@@ -11370,7 +11370,7 @@
           <a:bodyPr wrap="square" lIns="0" tIns="0" rIns="0" bIns="0" rtlCol="0" anchor="ctr"/>
           <a:lstStyle/>
           <a:p>
-            <a:pPr algn="l" indent="0" marL="0">
+            <a:pPr eaLnBrk="0" algn="l" indent="0" marL="0">
               <a:buNone/>
             </a:pPr>
             <a:r>
@@ -11417,7 +11417,7 @@
           <a:bodyPr wrap="square" lIns="0" tIns="0" rIns="0" bIns="0" rtlCol="0" anchor="ctr"/>
           <a:lstStyle/>
           <a:p>
-            <a:pPr algn="ctr" indent="0" marL="0">
+            <a:pPr eaLnBrk="0" algn="ctr" indent="0" marL="0">
               <a:buNone/>
             </a:pPr>
             <a:r>
@@ -11464,7 +11464,7 @@
           <a:bodyPr wrap="square" lIns="0" tIns="0" rIns="0" bIns="0" rtlCol="0" anchor="ctr"/>
           <a:lstStyle/>
           <a:p>
-            <a:pPr algn="ctr" indent="0" marL="0">
+            <a:pPr eaLnBrk="0" algn="ctr" indent="0" marL="0">
               <a:buNone/>
             </a:pPr>
             <a:r>
@@ -11511,7 +11511,7 @@
           <a:bodyPr wrap="square" lIns="0" tIns="0" rIns="0" bIns="0" rtlCol="0" anchor="ctr"/>
           <a:lstStyle/>
           <a:p>
-            <a:pPr algn="ctr" indent="0" marL="0">
+            <a:pPr eaLnBrk="0" algn="ctr" indent="0" marL="0">
               <a:buNone/>
             </a:pPr>
             <a:r>
@@ -11558,7 +11558,7 @@
           <a:bodyPr wrap="square" lIns="0" tIns="0" rIns="0" bIns="0" rtlCol="0" anchor="ctr"/>
           <a:lstStyle/>
           <a:p>
-            <a:pPr algn="ctr" indent="0" marL="0">
+            <a:pPr eaLnBrk="0" algn="ctr" indent="0" marL="0">
               <a:buNone/>
             </a:pPr>
             <a:r>
@@ -11605,7 +11605,7 @@
           <a:bodyPr wrap="square" lIns="0" tIns="0" rIns="0" bIns="0" rtlCol="0" anchor="ctr"/>
           <a:lstStyle/>
           <a:p>
-            <a:pPr algn="ctr" indent="0" marL="0">
+            <a:pPr eaLnBrk="0" algn="ctr" indent="0" marL="0">
               <a:buNone/>
             </a:pPr>
             <a:r>
@@ -11652,7 +11652,7 @@
           <a:bodyPr wrap="square" lIns="0" tIns="0" rIns="0" bIns="0" rtlCol="0" anchor="ctr"/>
           <a:lstStyle/>
           <a:p>
-            <a:pPr algn="ctr" indent="0" marL="0">
+            <a:pPr eaLnBrk="0" algn="ctr" indent="0" marL="0">
               <a:buNone/>
             </a:pPr>
             <a:r>
@@ -11699,7 +11699,7 @@
           <a:bodyPr wrap="square" lIns="0" tIns="0" rIns="0" bIns="0" rtlCol="0" anchor="ctr"/>
           <a:lstStyle/>
           <a:p>
-            <a:pPr algn="ctr" indent="0" marL="0">
+            <a:pPr eaLnBrk="0" algn="ctr" indent="0" marL="0">
               <a:buNone/>
             </a:pPr>
             <a:r>
@@ -11746,7 +11746,7 @@
           <a:bodyPr wrap="square" lIns="0" tIns="0" rIns="0" bIns="0" rtlCol="0" anchor="ctr"/>
           <a:lstStyle/>
           <a:p>
-            <a:pPr algn="ctr" indent="0" marL="0">
+            <a:pPr eaLnBrk="0" algn="ctr" indent="0" marL="0">
               <a:buNone/>
             </a:pPr>
             <a:r>
@@ -11793,7 +11793,7 @@
           <a:bodyPr wrap="square" lIns="0" tIns="0" rIns="0" bIns="0" rtlCol="0" anchor="ctr"/>
           <a:lstStyle/>
           <a:p>
-            <a:pPr algn="ctr" indent="0" marL="0">
+            <a:pPr eaLnBrk="0" algn="ctr" indent="0" marL="0">
               <a:buNone/>
             </a:pPr>
             <a:r>
@@ -11840,7 +11840,7 @@
           <a:bodyPr wrap="square" lIns="0" tIns="0" rIns="0" bIns="0" rtlCol="0" anchor="ctr"/>
           <a:lstStyle/>
           <a:p>
-            <a:pPr algn="ctr" indent="0" marL="0">
+            <a:pPr eaLnBrk="0" algn="ctr" indent="0" marL="0">
               <a:buNone/>
             </a:pPr>
             <a:r>
@@ -11885,7 +11885,7 @@
           <a:bodyPr wrap="square" lIns="0" tIns="0" rIns="0" bIns="0" rtlCol="0" anchor="ctr"/>
           <a:lstStyle/>
           <a:p>
-            <a:pPr algn="ctr" indent="0" marL="0">
+            <a:pPr eaLnBrk="0" algn="ctr" indent="0" marL="0">
               <a:buNone/>
             </a:pPr>
             <a:r>
@@ -11924,7 +11924,7 @@
           <a:bodyPr wrap="square" lIns="0" tIns="0" rIns="0" bIns="0" rtlCol="0" anchor="t"/>
           <a:lstStyle/>
           <a:p>
-            <a:pPr algn="l" indent="0" marL="0">
+            <a:pPr eaLnBrk="0" algn="l" indent="0" marL="0">
               <a:buNone/>
             </a:pPr>
             <a:r>
@@ -11969,7 +11969,7 @@
           <a:bodyPr wrap="square" lIns="0" tIns="0" rIns="0" bIns="0" rtlCol="0" anchor="ctr"/>
           <a:lstStyle/>
           <a:p>
-            <a:pPr algn="ctr" indent="0" marL="0">
+            <a:pPr eaLnBrk="0" algn="ctr" indent="0" marL="0">
               <a:buNone/>
             </a:pPr>
             <a:r>
@@ -12008,7 +12008,7 @@
           <a:bodyPr wrap="square" lIns="0" tIns="0" rIns="0" bIns="0" rtlCol="0" anchor="t"/>
           <a:lstStyle/>
           <a:p>
-            <a:pPr algn="l" indent="0" marL="0">
+            <a:pPr eaLnBrk="0" algn="l" indent="0" marL="0">
               <a:buNone/>
             </a:pPr>
             <a:r>
@@ -12053,7 +12053,7 @@
           <a:bodyPr wrap="square" lIns="0" tIns="0" rIns="0" bIns="0" rtlCol="0" anchor="ctr"/>
           <a:lstStyle/>
           <a:p>
-            <a:pPr algn="ctr" indent="0" marL="0">
+            <a:pPr eaLnBrk="0" algn="ctr" indent="0" marL="0">
               <a:buNone/>
             </a:pPr>
             <a:r>
@@ -12092,7 +12092,7 @@
           <a:bodyPr wrap="square" lIns="0" tIns="0" rIns="0" bIns="0" rtlCol="0" anchor="t"/>
           <a:lstStyle/>
           <a:p>
-            <a:pPr algn="l" indent="0" marL="0">
+            <a:pPr eaLnBrk="0" algn="l" indent="0" marL="0">
               <a:buNone/>
             </a:pPr>
             <a:r>
@@ -12149,7 +12149,7 @@
             </a:lvl1pPr>
           </a:lstStyle>
           <a:p>
-            <a:pPr algn="r"/>
+            <a:pPr eaLnBrk="0" algn="r"/>
             <a:fld id="{F7021451-1387-4CA6-816F-3879F97B5CBC}" type="slidenum">
               <a:rPr b="0" lang="en-US"/>
               <a:t>7</a:t>
@@ -12206,7 +12206,7 @@
           <a:bodyPr wrap="square" lIns="0" tIns="0" rIns="0" bIns="0" rtlCol="0" anchor="ctr"/>
           <a:lstStyle/>
           <a:p>
-            <a:pPr algn="l" indent="0" marL="0">
+            <a:pPr eaLnBrk="0" algn="l" indent="0" marL="0">
               <a:buNone/>
             </a:pPr>
             <a:r>
@@ -12245,7 +12245,7 @@
           <a:bodyPr wrap="square" lIns="0" tIns="0" rIns="0" bIns="0" rtlCol="0" anchor="ctr"/>
           <a:lstStyle/>
           <a:p>
-            <a:pPr algn="l" indent="0" marL="0">
+            <a:pPr eaLnBrk="0" algn="l" indent="0" marL="0">
               <a:buNone/>
             </a:pPr>
             <a:r>
@@ -12311,7 +12311,7 @@
           <a:bodyPr wrap="square" lIns="0" tIns="0" rIns="0" bIns="0" rtlCol="0" anchor="ctr"/>
           <a:lstStyle/>
           <a:p>
-            <a:pPr indent="0" marL="0">
+            <a:pPr eaLnBrk="0" indent="0" marL="0">
               <a:spcAft>
                 <a:spcPts val="600"/>
               </a:spcAft>
@@ -12361,7 +12361,7 @@
           <a:bodyPr wrap="square" lIns="0" tIns="0" rIns="0" bIns="0" rtlCol="0" anchor="ctr"/>
           <a:lstStyle/>
           <a:p>
-            <a:pPr algn="ctr" indent="0" marL="0">
+            <a:pPr eaLnBrk="0" algn="ctr" indent="0" marL="0">
               <a:buNone/>
             </a:pPr>
             <a:r>
@@ -12637,7 +12637,7 @@
           <a:bodyPr wrap="square" lIns="0" tIns="0" rIns="0" bIns="0" rtlCol="0" anchor="ctr"/>
           <a:lstStyle/>
           <a:p>
-            <a:pPr algn="ctr" indent="0" marL="0">
+            <a:pPr eaLnBrk="0" algn="ctr" indent="0" marL="0">
               <a:buNone/>
             </a:pPr>
             <a:r>
@@ -12788,7 +12788,7 @@
           <a:bodyPr wrap="square" lIns="0" tIns="0" rIns="0" bIns="0" rtlCol="0" anchor="ctr"/>
           <a:lstStyle/>
           <a:p>
-            <a:pPr algn="ctr" indent="0" marL="0">
+            <a:pPr eaLnBrk="0" algn="ctr" indent="0" marL="0">
               <a:buNone/>
             </a:pPr>
             <a:r>
@@ -13208,7 +13208,7 @@
       </p:sp>
       <p:sp>
         <p:nvSpPr>
-          <p:cNvPr id="38" name="S08-figure236" descr="십 칸 틀에 6개"/>
+          <p:cNvPr id="38" name="S08-figure236" descr="1개의 십 칸 틀 중 1번째: 모두 6개"/>
           <p:cNvSpPr/>
           <p:nvPr/>
         </p:nvSpPr>
@@ -13272,7 +13272,7 @@
             </a:lvl1pPr>
           </a:lstStyle>
           <a:p>
-            <a:pPr algn="r"/>
+            <a:pPr eaLnBrk="0" algn="r"/>
             <a:fld id="{F7021451-1387-4CA6-816F-3879F97B5CBC}" type="slidenum">
               <a:rPr b="0" lang="en-US"/>
               <a:t>8</a:t>
@@ -13329,7 +13329,7 @@
           <a:bodyPr wrap="square" lIns="0" tIns="0" rIns="0" bIns="0" rtlCol="0" anchor="ctr"/>
           <a:lstStyle/>
           <a:p>
-            <a:pPr algn="l" indent="0" marL="0">
+            <a:pPr eaLnBrk="0" algn="l" indent="0" marL="0">
               <a:buNone/>
             </a:pPr>
             <a:r>
@@ -13395,7 +13395,7 @@
           <a:bodyPr wrap="square" lIns="0" tIns="0" rIns="0" bIns="0" rtlCol="0" anchor="ctr"/>
           <a:lstStyle/>
           <a:p>
-            <a:pPr indent="0" marL="0">
+            <a:pPr eaLnBrk="0" indent="0" marL="0">
               <a:spcAft>
                 <a:spcPts val="600"/>
               </a:spcAft>
@@ -13464,7 +13464,7 @@
           <a:bodyPr wrap="square" lIns="0" tIns="0" rIns="0" bIns="0" rtlCol="0" anchor="ctr"/>
           <a:lstStyle/>
           <a:p>
-            <a:pPr indent="0" marL="0">
+            <a:pPr eaLnBrk="0" indent="0" marL="0">
               <a:spcAft>
                 <a:spcPts val="600"/>
               </a:spcAft>
@@ -13514,7 +13514,7 @@
           <a:bodyPr wrap="square" lIns="177800" tIns="0" rIns="177800" bIns="0" rtlCol="0" anchor="ctr"/>
           <a:lstStyle/>
           <a:p>
-            <a:pPr algn="l" indent="0" marL="0">
+            <a:pPr eaLnBrk="0" algn="l" indent="0" marL="0">
               <a:buNone/>
             </a:pPr>
             <a:r>
@@ -13553,7 +13553,7 @@
           <a:bodyPr wrap="square" lIns="0" tIns="0" rIns="0" bIns="0" rtlCol="0" anchor="t"/>
           <a:lstStyle/>
           <a:p>
-            <a:pPr algn="l" indent="0" marL="0">
+            <a:pPr eaLnBrk="0" algn="l" indent="0" marL="0">
               <a:buNone/>
             </a:pPr>
             <a:r>
@@ -13600,7 +13600,7 @@
           <a:bodyPr wrap="square" lIns="177800" tIns="0" rIns="177800" bIns="0" rtlCol="0" anchor="ctr"/>
           <a:lstStyle/>
           <a:p>
-            <a:pPr algn="l" indent="0" marL="0">
+            <a:pPr eaLnBrk="0" algn="l" indent="0" marL="0">
               <a:buNone/>
             </a:pPr>
             <a:r>
@@ -13793,7 +13793,7 @@
           <a:bodyPr wrap="square" lIns="0" tIns="0" rIns="0" bIns="0" rtlCol="0" anchor="t"/>
           <a:lstStyle/>
           <a:p>
-            <a:pPr algn="l" indent="0" marL="0">
+            <a:pPr eaLnBrk="0" algn="l" indent="0" marL="0">
               <a:buNone/>
             </a:pPr>
             <a:r>
@@ -13850,7 +13850,7 @@
             </a:lvl1pPr>
           </a:lstStyle>
           <a:p>
-            <a:pPr algn="r"/>
+            <a:pPr eaLnBrk="0" algn="r"/>
             <a:fld id="{F7021451-1387-4CA6-816F-3879F97B5CBC}" type="slidenum">
               <a:rPr b="0" lang="en-US"/>
               <a:t>9</a:t>

--- a/dist/초1/수학/수와연산/초1_수학_수와연산_01_9까지의수.pptx
+++ b/dist/초1/수학/수와연산/초1_수학_수와연산_01_9까지의수.pptx
@@ -119,13 +119,13 @@
   <p:extLst>
     <p:ext uri="{521415D9-36F7-43E2-AB2F-B90AF26B5E84}">
       <p14:sectionLst xmlns:p14="http://schemas.microsoft.com/office/powerpoint/2010/main">
-        <p14:section name="도입" id="{56e98aeb-2328-0ab2-0aba-37ce48060b90}">
+        <p14:section name="도입" id="{51496034-5619-752d-132b-ce572c4d2705}">
           <p14:sldIdLst>
             <p14:sldId id="256"/>
             <p14:sldId id="257"/>
           </p14:sldIdLst>
         </p14:section>
-        <p14:section name="개념" id="{46b7b5ab-1688-f46d-e8dc-a76a9dd7f2a0}">
+        <p14:section name="개념" id="{2365b2d6-5b25-ca08-3ef9-e101a2857f7c}">
           <p14:sldIdLst>
             <p14:sldId id="258"/>
             <p14:sldId id="259"/>
@@ -134,24 +134,24 @@
             <p14:sldId id="262"/>
           </p14:sldIdLst>
         </p14:section>
-        <p14:section name="연습" id="{66f5cafb-e391-a74f-9e8f-0f368071160b}">
+        <p14:section name="연습" id="{8f8e448a-add6-cada-af4e-fa9216aa9417}">
           <p14:sldIdLst>
             <p14:sldId id="263"/>
             <p14:sldId id="264"/>
           </p14:sldIdLst>
         </p14:section>
-        <p14:section name="확인" id="{c16beeab-f3a2-65ca-bdf5-c64a95f62805}">
+        <p14:section name="확인" id="{b7a2dda9-ac5e-3e32-4c23-97ab7f038558}">
           <p14:sldIdLst>
             <p14:sldId id="265"/>
             <p14:sldId id="266"/>
           </p14:sldIdLst>
         </p14:section>
-        <p14:section name="정리" id="{02506a0a-bd01-06b4-8fd4-c897cad3cc8f}">
+        <p14:section name="정리" id="{02b77114-0a5f-4d0c-b59d-f9ace751cc90}">
           <p14:sldIdLst>
             <p14:sldId id="267"/>
           </p14:sldIdLst>
         </p14:section>
-        <p14:section name="보충" id="{4e98ceab-4952-a9b0-9efa-a26133d5e011}">
+        <p14:section name="보충" id="{6b62c6d3-44f1-9fe4-33a0-2834320a1d5d}">
           <p14:sldIdLst>
             <p14:sldId id="268"/>
           </p14:sldIdLst>
@@ -12387,7 +12387,7 @@
         </p:nvSpPr>
         <p:spPr>
           <a:xfrm>
-            <a:off x="2619756" y="2098548"/>
+            <a:off x="3259836" y="2098548"/>
             <a:ext cx="283464" cy="283464"/>
           </a:xfrm>
           <a:prstGeom prst="ellipse">
@@ -12412,7 +12412,7 @@
         </p:nvSpPr>
         <p:spPr>
           <a:xfrm>
-            <a:off x="3076956" y="2098548"/>
+            <a:off x="3717036" y="2098548"/>
             <a:ext cx="283464" cy="283464"/>
           </a:xfrm>
           <a:prstGeom prst="ellipse">
@@ -12437,7 +12437,7 @@
         </p:nvSpPr>
         <p:spPr>
           <a:xfrm>
-            <a:off x="3534156" y="2098548"/>
+            <a:off x="4174236" y="2098548"/>
             <a:ext cx="283464" cy="283464"/>
           </a:xfrm>
           <a:prstGeom prst="ellipse">
@@ -12462,7 +12462,7 @@
         </p:nvSpPr>
         <p:spPr>
           <a:xfrm>
-            <a:off x="3991356" y="2098548"/>
+            <a:off x="4631436" y="2098548"/>
             <a:ext cx="283464" cy="283464"/>
           </a:xfrm>
           <a:prstGeom prst="ellipse">
@@ -12487,7 +12487,7 @@
         </p:nvSpPr>
         <p:spPr>
           <a:xfrm>
-            <a:off x="2619756" y="2555748"/>
+            <a:off x="3259836" y="2555748"/>
             <a:ext cx="283464" cy="283464"/>
           </a:xfrm>
           <a:prstGeom prst="ellipse">
@@ -12512,7 +12512,7 @@
         </p:nvSpPr>
         <p:spPr>
           <a:xfrm>
-            <a:off x="3076956" y="2555748"/>
+            <a:off x="3717036" y="2555748"/>
             <a:ext cx="283464" cy="283464"/>
           </a:xfrm>
           <a:prstGeom prst="ellipse">
@@ -12537,7 +12537,7 @@
         </p:nvSpPr>
         <p:spPr>
           <a:xfrm>
-            <a:off x="3534156" y="2555748"/>
+            <a:off x="4174236" y="2555748"/>
             <a:ext cx="283464" cy="283464"/>
           </a:xfrm>
           <a:prstGeom prst="ellipse">
@@ -12562,7 +12562,7 @@
         </p:nvSpPr>
         <p:spPr>
           <a:xfrm>
-            <a:off x="3991356" y="2555748"/>
+            <a:off x="4631436" y="2555748"/>
             <a:ext cx="283464" cy="283464"/>
           </a:xfrm>
           <a:prstGeom prst="ellipse">
@@ -12587,7 +12587,7 @@
         </p:nvSpPr>
         <p:spPr>
           <a:xfrm>
-            <a:off x="2532888" y="2011680"/>
+            <a:off x="3172968" y="2011680"/>
             <a:ext cx="1828800" cy="914400"/>
           </a:xfrm>
           <a:prstGeom prst="rect">
@@ -12663,7 +12663,7 @@
         </p:nvSpPr>
         <p:spPr>
           <a:xfrm>
-            <a:off x="2548890" y="3353562"/>
+            <a:off x="3188970" y="3353562"/>
             <a:ext cx="425196" cy="425196"/>
           </a:xfrm>
           <a:prstGeom prst="ellipse">
@@ -12688,7 +12688,7 @@
         </p:nvSpPr>
         <p:spPr>
           <a:xfrm>
-            <a:off x="3234690" y="3353562"/>
+            <a:off x="3874770" y="3353562"/>
             <a:ext cx="425196" cy="425196"/>
           </a:xfrm>
           <a:prstGeom prst="ellipse">
@@ -12713,7 +12713,7 @@
         </p:nvSpPr>
         <p:spPr>
           <a:xfrm>
-            <a:off x="3920490" y="3353562"/>
+            <a:off x="4560570" y="3353562"/>
             <a:ext cx="425196" cy="425196"/>
           </a:xfrm>
           <a:prstGeom prst="ellipse">
@@ -12738,7 +12738,7 @@
         </p:nvSpPr>
         <p:spPr>
           <a:xfrm>
-            <a:off x="2418588" y="3223260"/>
+            <a:off x="3058668" y="3223260"/>
             <a:ext cx="2057400" cy="685800"/>
           </a:xfrm>
           <a:prstGeom prst="rect">
@@ -12814,7 +12814,7 @@
         </p:nvSpPr>
         <p:spPr>
           <a:xfrm>
-            <a:off x="2304288" y="4206240"/>
+            <a:off x="2944368" y="4206240"/>
             <a:ext cx="457200" cy="457200"/>
           </a:xfrm>
           <a:prstGeom prst="rect">
@@ -12839,7 +12839,7 @@
         </p:nvSpPr>
         <p:spPr>
           <a:xfrm>
-            <a:off x="2382012" y="4283964"/>
+            <a:off x="3022092" y="4283964"/>
             <a:ext cx="301752" cy="301752"/>
           </a:xfrm>
           <a:prstGeom prst="ellipse">
@@ -12864,7 +12864,7 @@
         </p:nvSpPr>
         <p:spPr>
           <a:xfrm>
-            <a:off x="2761488" y="4206240"/>
+            <a:off x="3401568" y="4206240"/>
             <a:ext cx="457200" cy="457200"/>
           </a:xfrm>
           <a:prstGeom prst="rect">
@@ -12889,7 +12889,7 @@
         </p:nvSpPr>
         <p:spPr>
           <a:xfrm>
-            <a:off x="2839212" y="4283964"/>
+            <a:off x="3479292" y="4283964"/>
             <a:ext cx="301752" cy="301752"/>
           </a:xfrm>
           <a:prstGeom prst="ellipse">
@@ -12914,7 +12914,7 @@
         </p:nvSpPr>
         <p:spPr>
           <a:xfrm>
-            <a:off x="3218688" y="4206240"/>
+            <a:off x="3858768" y="4206240"/>
             <a:ext cx="457200" cy="457200"/>
           </a:xfrm>
           <a:prstGeom prst="rect">
@@ -12939,7 +12939,7 @@
         </p:nvSpPr>
         <p:spPr>
           <a:xfrm>
-            <a:off x="3296412" y="4283964"/>
+            <a:off x="3936492" y="4283964"/>
             <a:ext cx="301752" cy="301752"/>
           </a:xfrm>
           <a:prstGeom prst="ellipse">
@@ -12964,7 +12964,7 @@
         </p:nvSpPr>
         <p:spPr>
           <a:xfrm>
-            <a:off x="3675888" y="4206240"/>
+            <a:off x="4315968" y="4206240"/>
             <a:ext cx="457200" cy="457200"/>
           </a:xfrm>
           <a:prstGeom prst="rect">
@@ -12989,7 +12989,7 @@
         </p:nvSpPr>
         <p:spPr>
           <a:xfrm>
-            <a:off x="3753612" y="4283964"/>
+            <a:off x="4393692" y="4283964"/>
             <a:ext cx="301752" cy="301752"/>
           </a:xfrm>
           <a:prstGeom prst="ellipse">
@@ -13014,7 +13014,7 @@
         </p:nvSpPr>
         <p:spPr>
           <a:xfrm>
-            <a:off x="4133088" y="4206240"/>
+            <a:off x="4773168" y="4206240"/>
             <a:ext cx="457200" cy="457200"/>
           </a:xfrm>
           <a:prstGeom prst="rect">
@@ -13039,7 +13039,7 @@
         </p:nvSpPr>
         <p:spPr>
           <a:xfrm>
-            <a:off x="4210812" y="4283964"/>
+            <a:off x="4850892" y="4283964"/>
             <a:ext cx="301752" cy="301752"/>
           </a:xfrm>
           <a:prstGeom prst="ellipse">
@@ -13064,7 +13064,7 @@
         </p:nvSpPr>
         <p:spPr>
           <a:xfrm>
-            <a:off x="2304288" y="4663440"/>
+            <a:off x="2944368" y="4663440"/>
             <a:ext cx="457200" cy="457200"/>
           </a:xfrm>
           <a:prstGeom prst="rect">
@@ -13089,7 +13089,7 @@
         </p:nvSpPr>
         <p:spPr>
           <a:xfrm>
-            <a:off x="2382012" y="4741164"/>
+            <a:off x="3022092" y="4741164"/>
             <a:ext cx="301752" cy="301752"/>
           </a:xfrm>
           <a:prstGeom prst="ellipse">
@@ -13114,7 +13114,7 @@
         </p:nvSpPr>
         <p:spPr>
           <a:xfrm>
-            <a:off x="2761488" y="4663440"/>
+            <a:off x="3401568" y="4663440"/>
             <a:ext cx="457200" cy="457200"/>
           </a:xfrm>
           <a:prstGeom prst="rect">
@@ -13139,7 +13139,7 @@
         </p:nvSpPr>
         <p:spPr>
           <a:xfrm>
-            <a:off x="3218688" y="4663440"/>
+            <a:off x="3858768" y="4663440"/>
             <a:ext cx="457200" cy="457200"/>
           </a:xfrm>
           <a:prstGeom prst="rect">
@@ -13164,7 +13164,7 @@
         </p:nvSpPr>
         <p:spPr>
           <a:xfrm>
-            <a:off x="3675888" y="4663440"/>
+            <a:off x="4315968" y="4663440"/>
             <a:ext cx="457200" cy="457200"/>
           </a:xfrm>
           <a:prstGeom prst="rect">
@@ -13189,7 +13189,7 @@
         </p:nvSpPr>
         <p:spPr>
           <a:xfrm>
-            <a:off x="4133088" y="4663440"/>
+            <a:off x="4773168" y="4663440"/>
             <a:ext cx="457200" cy="457200"/>
           </a:xfrm>
           <a:prstGeom prst="rect">
@@ -13214,7 +13214,7 @@
         </p:nvSpPr>
         <p:spPr>
           <a:xfrm>
-            <a:off x="2304288" y="4206240"/>
+            <a:off x="2944368" y="4206240"/>
             <a:ext cx="2286000" cy="914400"/>
           </a:xfrm>
           <a:prstGeom prst="rect">

--- a/dist/초1/수학/수와연산/초1_수학_수와연산_01_9까지의수.pptx
+++ b/dist/초1/수학/수와연산/초1_수학_수와연산_01_9까지의수.pptx
@@ -119,13 +119,13 @@
   <p:extLst>
     <p:ext uri="{521415D9-36F7-43E2-AB2F-B90AF26B5E84}">
       <p14:sectionLst xmlns:p14="http://schemas.microsoft.com/office/powerpoint/2010/main">
-        <p14:section name="도입" id="{51496034-5619-752d-132b-ce572c4d2705}">
+        <p14:section name="도입" id="{7b2e9e0b-11f2-bdce-fac1-deb52f910aa1}">
           <p14:sldIdLst>
             <p14:sldId id="256"/>
             <p14:sldId id="257"/>
           </p14:sldIdLst>
         </p14:section>
-        <p14:section name="개념" id="{2365b2d6-5b25-ca08-3ef9-e101a2857f7c}">
+        <p14:section name="개념" id="{f86e8cf4-e3a8-6c81-3826-4075aca658b9}">
           <p14:sldIdLst>
             <p14:sldId id="258"/>
             <p14:sldId id="259"/>
@@ -134,24 +134,24 @@
             <p14:sldId id="262"/>
           </p14:sldIdLst>
         </p14:section>
-        <p14:section name="연습" id="{8f8e448a-add6-cada-af4e-fa9216aa9417}">
+        <p14:section name="연습" id="{03a8ed93-e39d-2894-b729-f39739bd46a3}">
           <p14:sldIdLst>
             <p14:sldId id="263"/>
             <p14:sldId id="264"/>
           </p14:sldIdLst>
         </p14:section>
-        <p14:section name="확인" id="{b7a2dda9-ac5e-3e32-4c23-97ab7f038558}">
+        <p14:section name="확인" id="{418eda89-ea34-420e-a609-f6c3a9785741}">
           <p14:sldIdLst>
             <p14:sldId id="265"/>
             <p14:sldId id="266"/>
           </p14:sldIdLst>
         </p14:section>
-        <p14:section name="정리" id="{02b77114-0a5f-4d0c-b59d-f9ace751cc90}">
+        <p14:section name="정리" id="{9e8a00bd-541f-5c46-4742-e7bc881dd45f}">
           <p14:sldIdLst>
             <p14:sldId id="267"/>
           </p14:sldIdLst>
         </p14:section>
-        <p14:section name="보충" id="{6b62c6d3-44f1-9fe4-33a0-2834320a1d5d}">
+        <p14:section name="보충" id="{c3db5992-e44f-f587-4349-7911a35deb3f}">
           <p14:sldIdLst>
             <p14:sldId id="268"/>
           </p14:sldIdLst>
